--- a/Reflex.pptx
+++ b/Reflex.pptx
@@ -264,7 +264,7 @@
           <a:p>
             <a:fld id="{9B4DD0ED-3F83-4373-91EC-69CB665371F7}" type="datetimeFigureOut">
               <a:rPr lang="en-US" smtClean="0"/>
-              <a:t>8/30/2026</a:t>
+              <a:t>9/5/2026</a:t>
             </a:fld>
             <a:endParaRPr lang="en-US"/>
           </a:p>
@@ -462,7 +462,7 @@
           <a:p>
             <a:fld id="{9B4DD0ED-3F83-4373-91EC-69CB665371F7}" type="datetimeFigureOut">
               <a:rPr lang="en-US" smtClean="0"/>
-              <a:t>8/30/2026</a:t>
+              <a:t>9/5/2026</a:t>
             </a:fld>
             <a:endParaRPr lang="en-US"/>
           </a:p>
@@ -670,7 +670,7 @@
           <a:p>
             <a:fld id="{9B4DD0ED-3F83-4373-91EC-69CB665371F7}" type="datetimeFigureOut">
               <a:rPr lang="en-US" smtClean="0"/>
-              <a:t>8/30/2026</a:t>
+              <a:t>9/5/2026</a:t>
             </a:fld>
             <a:endParaRPr lang="en-US"/>
           </a:p>
@@ -868,7 +868,7 @@
           <a:p>
             <a:fld id="{9B4DD0ED-3F83-4373-91EC-69CB665371F7}" type="datetimeFigureOut">
               <a:rPr lang="en-US" smtClean="0"/>
-              <a:t>8/30/2026</a:t>
+              <a:t>9/5/2026</a:t>
             </a:fld>
             <a:endParaRPr lang="en-US"/>
           </a:p>
@@ -1143,7 +1143,7 @@
           <a:p>
             <a:fld id="{9B4DD0ED-3F83-4373-91EC-69CB665371F7}" type="datetimeFigureOut">
               <a:rPr lang="en-US" smtClean="0"/>
-              <a:t>8/30/2026</a:t>
+              <a:t>9/5/2026</a:t>
             </a:fld>
             <a:endParaRPr lang="en-US"/>
           </a:p>
@@ -1408,7 +1408,7 @@
           <a:p>
             <a:fld id="{9B4DD0ED-3F83-4373-91EC-69CB665371F7}" type="datetimeFigureOut">
               <a:rPr lang="en-US" smtClean="0"/>
-              <a:t>8/30/2026</a:t>
+              <a:t>9/5/2026</a:t>
             </a:fld>
             <a:endParaRPr lang="en-US"/>
           </a:p>
@@ -1820,7 +1820,7 @@
           <a:p>
             <a:fld id="{9B4DD0ED-3F83-4373-91EC-69CB665371F7}" type="datetimeFigureOut">
               <a:rPr lang="en-US" smtClean="0"/>
-              <a:t>8/30/2026</a:t>
+              <a:t>9/5/2026</a:t>
             </a:fld>
             <a:endParaRPr lang="en-US"/>
           </a:p>
@@ -1961,7 +1961,7 @@
           <a:p>
             <a:fld id="{9B4DD0ED-3F83-4373-91EC-69CB665371F7}" type="datetimeFigureOut">
               <a:rPr lang="en-US" smtClean="0"/>
-              <a:t>8/30/2026</a:t>
+              <a:t>9/5/2026</a:t>
             </a:fld>
             <a:endParaRPr lang="en-US"/>
           </a:p>
@@ -2074,7 +2074,7 @@
           <a:p>
             <a:fld id="{9B4DD0ED-3F83-4373-91EC-69CB665371F7}" type="datetimeFigureOut">
               <a:rPr lang="en-US" smtClean="0"/>
-              <a:t>8/30/2026</a:t>
+              <a:t>9/5/2026</a:t>
             </a:fld>
             <a:endParaRPr lang="en-US"/>
           </a:p>
@@ -2385,7 +2385,7 @@
           <a:p>
             <a:fld id="{9B4DD0ED-3F83-4373-91EC-69CB665371F7}" type="datetimeFigureOut">
               <a:rPr lang="en-US" smtClean="0"/>
-              <a:t>8/30/2026</a:t>
+              <a:t>9/5/2026</a:t>
             </a:fld>
             <a:endParaRPr lang="en-US"/>
           </a:p>
@@ -2673,7 +2673,7 @@
           <a:p>
             <a:fld id="{9B4DD0ED-3F83-4373-91EC-69CB665371F7}" type="datetimeFigureOut">
               <a:rPr lang="en-US" smtClean="0"/>
-              <a:t>8/30/2026</a:t>
+              <a:t>9/5/2026</a:t>
             </a:fld>
             <a:endParaRPr lang="en-US"/>
           </a:p>
@@ -2914,7 +2914,7 @@
           <a:p>
             <a:fld id="{9B4DD0ED-3F83-4373-91EC-69CB665371F7}" type="datetimeFigureOut">
               <a:rPr lang="en-US" smtClean="0"/>
-              <a:t>8/30/2026</a:t>
+              <a:t>9/5/2026</a:t>
             </a:fld>
             <a:endParaRPr lang="en-US"/>
           </a:p>
@@ -3405,7 +3405,7 @@
           <a:lstStyle/>
           <a:p>
             <a:r>
-              <a:rPr kumimoji="0" lang="en-US" sz="4400" b="1" i="0" u="none" strike="noStrike" kern="1200" cap="none" spc="0" normalizeH="0" baseline="0" noProof="0" dirty="0">
+              <a:rPr kumimoji="0" lang="en-US" sz="4400" b="1" i="0" u="none" strike="noStrike" kern="1200" cap="none" spc="0" normalizeH="0" baseline="0" noProof="0">
                 <a:ln>
                   <a:noFill/>
                 </a:ln>
@@ -3421,7 +3421,26 @@
                 <a:ea typeface="+mj-ea"/>
                 <a:cs typeface="Times New Roman" panose="02020603050405020304" pitchFamily="18" charset="0"/>
               </a:rPr>
-              <a:t>Day one (Freeze &amp; Storyboard</a:t>
+              <a:t>(</a:t>
+            </a:r>
+            <a:r>
+              <a:rPr kumimoji="0" lang="en-US" sz="4400" b="1" i="0" u="none" strike="noStrike" kern="1200" cap="none" spc="0" normalizeH="0" baseline="0" noProof="0" dirty="0">
+                <a:ln>
+                  <a:noFill/>
+                </a:ln>
+                <a:solidFill>
+                  <a:schemeClr val="tx2">
+                    <a:lumMod val="50000"/>
+                  </a:schemeClr>
+                </a:solidFill>
+                <a:effectLst/>
+                <a:uLnTx/>
+                <a:uFillTx/>
+                <a:latin typeface="Times New Roman" panose="02020603050405020304" pitchFamily="18" charset="0"/>
+                <a:ea typeface="+mj-ea"/>
+                <a:cs typeface="Times New Roman" panose="02020603050405020304" pitchFamily="18" charset="0"/>
+              </a:rPr>
+              <a:t>Freeze &amp; Storyboard</a:t>
             </a:r>
             <a:r>
               <a:rPr kumimoji="0" lang="en-US" sz="4400" b="1" i="0" u="none" strike="noStrike" kern="1200" cap="none" spc="0" normalizeH="0" baseline="0" noProof="0" dirty="0">
